--- a/DP/slides/Lecture-16.pptx
+++ b/DP/slides/Lecture-16.pptx
@@ -311,7 +311,7 @@
           <a:p>
             <a:fld id="{9F18236B-CE04-430A-92A3-9352467EFD31}" type="datetimeFigureOut">
               <a:rPr lang="en-IN" smtClean="0"/>
-              <a:t>17-10-2023</a:t>
+              <a:t>05-11-2024</a:t>
             </a:fld>
             <a:endParaRPr lang="en-IN"/>
           </a:p>
@@ -511,7 +511,7 @@
           <a:p>
             <a:fld id="{9F18236B-CE04-430A-92A3-9352467EFD31}" type="datetimeFigureOut">
               <a:rPr lang="en-IN" smtClean="0"/>
-              <a:t>17-10-2023</a:t>
+              <a:t>05-11-2024</a:t>
             </a:fld>
             <a:endParaRPr lang="en-IN"/>
           </a:p>
@@ -721,7 +721,7 @@
           <a:p>
             <a:fld id="{9F18236B-CE04-430A-92A3-9352467EFD31}" type="datetimeFigureOut">
               <a:rPr lang="en-IN" smtClean="0"/>
-              <a:t>17-10-2023</a:t>
+              <a:t>05-11-2024</a:t>
             </a:fld>
             <a:endParaRPr lang="en-IN"/>
           </a:p>
@@ -921,7 +921,7 @@
           <a:p>
             <a:fld id="{9F18236B-CE04-430A-92A3-9352467EFD31}" type="datetimeFigureOut">
               <a:rPr lang="en-IN" smtClean="0"/>
-              <a:t>17-10-2023</a:t>
+              <a:t>05-11-2024</a:t>
             </a:fld>
             <a:endParaRPr lang="en-IN"/>
           </a:p>
@@ -1197,7 +1197,7 @@
           <a:p>
             <a:fld id="{9F18236B-CE04-430A-92A3-9352467EFD31}" type="datetimeFigureOut">
               <a:rPr lang="en-IN" smtClean="0"/>
-              <a:t>17-10-2023</a:t>
+              <a:t>05-11-2024</a:t>
             </a:fld>
             <a:endParaRPr lang="en-IN"/>
           </a:p>
@@ -1465,7 +1465,7 @@
           <a:p>
             <a:fld id="{9F18236B-CE04-430A-92A3-9352467EFD31}" type="datetimeFigureOut">
               <a:rPr lang="en-IN" smtClean="0"/>
-              <a:t>17-10-2023</a:t>
+              <a:t>05-11-2024</a:t>
             </a:fld>
             <a:endParaRPr lang="en-IN"/>
           </a:p>
@@ -1880,7 +1880,7 @@
           <a:p>
             <a:fld id="{9F18236B-CE04-430A-92A3-9352467EFD31}" type="datetimeFigureOut">
               <a:rPr lang="en-IN" smtClean="0"/>
-              <a:t>17-10-2023</a:t>
+              <a:t>05-11-2024</a:t>
             </a:fld>
             <a:endParaRPr lang="en-IN"/>
           </a:p>
@@ -2022,7 +2022,7 @@
           <a:p>
             <a:fld id="{9F18236B-CE04-430A-92A3-9352467EFD31}" type="datetimeFigureOut">
               <a:rPr lang="en-IN" smtClean="0"/>
-              <a:t>17-10-2023</a:t>
+              <a:t>05-11-2024</a:t>
             </a:fld>
             <a:endParaRPr lang="en-IN"/>
           </a:p>
@@ -2135,7 +2135,7 @@
           <a:p>
             <a:fld id="{9F18236B-CE04-430A-92A3-9352467EFD31}" type="datetimeFigureOut">
               <a:rPr lang="en-IN" smtClean="0"/>
-              <a:t>17-10-2023</a:t>
+              <a:t>05-11-2024</a:t>
             </a:fld>
             <a:endParaRPr lang="en-IN"/>
           </a:p>
@@ -2448,7 +2448,7 @@
           <a:p>
             <a:fld id="{9F18236B-CE04-430A-92A3-9352467EFD31}" type="datetimeFigureOut">
               <a:rPr lang="en-IN" smtClean="0"/>
-              <a:t>17-10-2023</a:t>
+              <a:t>05-11-2024</a:t>
             </a:fld>
             <a:endParaRPr lang="en-IN"/>
           </a:p>
@@ -2737,7 +2737,7 @@
           <a:p>
             <a:fld id="{9F18236B-CE04-430A-92A3-9352467EFD31}" type="datetimeFigureOut">
               <a:rPr lang="en-IN" smtClean="0"/>
-              <a:t>17-10-2023</a:t>
+              <a:t>05-11-2024</a:t>
             </a:fld>
             <a:endParaRPr lang="en-IN"/>
           </a:p>
@@ -2980,7 +2980,7 @@
           <a:p>
             <a:fld id="{9F18236B-CE04-430A-92A3-9352467EFD31}" type="datetimeFigureOut">
               <a:rPr lang="en-IN" smtClean="0"/>
-              <a:t>17-10-2023</a:t>
+              <a:t>05-11-2024</a:t>
             </a:fld>
             <a:endParaRPr lang="en-IN"/>
           </a:p>
@@ -13461,8 +13461,8 @@
           </a:p>
         </p:txBody>
       </p:sp>
-      <mc:AlternateContent xmlns:mc="http://schemas.openxmlformats.org/markup-compatibility/2006" xmlns:a14="http://schemas.microsoft.com/office/drawing/2010/main">
-        <mc:Choice Requires="a14">
+      <mc:AlternateContent xmlns:mc="http://schemas.openxmlformats.org/markup-compatibility/2006">
+        <mc:Choice xmlns:a14="http://schemas.microsoft.com/office/drawing/2010/main" Requires="a14">
           <p:sp>
             <p:nvSpPr>
               <p:cNvPr id="3" name="Content Placeholder 2">
@@ -13531,7 +13531,19 @@
                         <a:rPr lang="en-IN" b="0" i="1" smtClean="0">
                           <a:latin typeface="Cambria Math" panose="02040503050406030204" pitchFamily="18" charset="0"/>
                         </a:rPr>
-                        <m:t>=10→¬</m:t>
+                        <m:t>=10</m:t>
+                      </m:r>
+                      <m:r>
+                        <a:rPr lang="en-IN" b="0" i="1" smtClean="0">
+                          <a:latin typeface="Cambria Math" panose="02040503050406030204" pitchFamily="18" charset="0"/>
+                        </a:rPr>
+                        <m:t>∧</m:t>
+                      </m:r>
+                      <m:r>
+                        <a:rPr lang="en-IN" b="0" i="1" smtClean="0">
+                          <a:latin typeface="Cambria Math" panose="02040503050406030204" pitchFamily="18" charset="0"/>
+                        </a:rPr>
+                        <m:t>¬</m:t>
                       </m:r>
                       <m:d>
                         <m:dPr>
@@ -13669,7 +13681,19 @@
                         <a:rPr lang="en-IN" b="0" i="1" smtClean="0">
                           <a:latin typeface="Cambria Math" panose="02040503050406030204" pitchFamily="18" charset="0"/>
                         </a:rPr>
-                        <m:t>=10→¬(</m:t>
+                        <m:t>=10</m:t>
+                      </m:r>
+                      <m:r>
+                        <a:rPr lang="en-IN" b="0" i="1" smtClean="0">
+                          <a:latin typeface="Cambria Math" panose="02040503050406030204" pitchFamily="18" charset="0"/>
+                        </a:rPr>
+                        <m:t>∧</m:t>
+                      </m:r>
+                      <m:r>
+                        <a:rPr lang="en-IN" b="0" i="1" smtClean="0">
+                          <a:latin typeface="Cambria Math" panose="02040503050406030204" pitchFamily="18" charset="0"/>
+                        </a:rPr>
+                        <m:t>¬(</m:t>
                       </m:r>
                       <m:r>
                         <a:rPr lang="en-IN" b="0" i="1" smtClean="0">
@@ -14005,7 +14029,7 @@
             </p:txBody>
           </p:sp>
         </mc:Choice>
-        <mc:Fallback xmlns="">
+        <mc:Fallback>
           <p:sp>
             <p:nvSpPr>
               <p:cNvPr id="3" name="Content Placeholder 2">
@@ -14195,8 +14219,8 @@
           </a:p>
         </p:txBody>
       </p:sp>
-      <mc:AlternateContent xmlns:mc="http://schemas.openxmlformats.org/markup-compatibility/2006" xmlns:a14="http://schemas.microsoft.com/office/drawing/2010/main">
-        <mc:Choice Requires="a14">
+      <mc:AlternateContent xmlns:mc="http://schemas.openxmlformats.org/markup-compatibility/2006">
+        <mc:Choice xmlns:a14="http://schemas.microsoft.com/office/drawing/2010/main" Requires="a14">
           <p:sp>
             <p:nvSpPr>
               <p:cNvPr id="3" name="Content Placeholder 2">
@@ -14267,7 +14291,19 @@
                         <a:rPr lang="en-IN" b="0" i="1" smtClean="0">
                           <a:latin typeface="Cambria Math" panose="02040503050406030204" pitchFamily="18" charset="0"/>
                         </a:rPr>
-                        <m:t>=10→¬</m:t>
+                        <m:t>=10</m:t>
+                      </m:r>
+                      <m:r>
+                        <a:rPr lang="en-IN" b="0" i="1" smtClean="0">
+                          <a:latin typeface="Cambria Math" panose="02040503050406030204" pitchFamily="18" charset="0"/>
+                        </a:rPr>
+                        <m:t>∧</m:t>
+                      </m:r>
+                      <m:r>
+                        <a:rPr lang="en-IN" b="0" i="1" smtClean="0">
+                          <a:latin typeface="Cambria Math" panose="02040503050406030204" pitchFamily="18" charset="0"/>
+                        </a:rPr>
+                        <m:t>¬</m:t>
                       </m:r>
                       <m:d>
                         <m:dPr>
@@ -14405,7 +14441,19 @@
                         <a:rPr lang="en-IN" b="0" i="1" smtClean="0">
                           <a:latin typeface="Cambria Math" panose="02040503050406030204" pitchFamily="18" charset="0"/>
                         </a:rPr>
-                        <m:t>=10→¬(</m:t>
+                        <m:t>=10</m:t>
+                      </m:r>
+                      <m:r>
+                        <a:rPr lang="en-IN" b="0" i="1" smtClean="0">
+                          <a:latin typeface="Cambria Math" panose="02040503050406030204" pitchFamily="18" charset="0"/>
+                        </a:rPr>
+                        <m:t>∧</m:t>
+                      </m:r>
+                      <m:r>
+                        <a:rPr lang="en-IN" b="0" i="1" smtClean="0">
+                          <a:latin typeface="Cambria Math" panose="02040503050406030204" pitchFamily="18" charset="0"/>
+                        </a:rPr>
+                        <m:t>¬(</m:t>
                       </m:r>
                       <m:r>
                         <a:rPr lang="en-IN" b="0" i="1" smtClean="0">
@@ -14754,7 +14802,7 @@
             </p:txBody>
           </p:sp>
         </mc:Choice>
-        <mc:Fallback xmlns="">
+        <mc:Fallback>
           <p:sp>
             <p:nvSpPr>
               <p:cNvPr id="3" name="Content Placeholder 2">
@@ -14852,8 +14900,8 @@
           </a:p>
         </p:txBody>
       </p:sp>
-      <mc:AlternateContent xmlns:mc="http://schemas.openxmlformats.org/markup-compatibility/2006" xmlns:a14="http://schemas.microsoft.com/office/drawing/2010/main">
-        <mc:Choice Requires="a14">
+      <mc:AlternateContent xmlns:mc="http://schemas.openxmlformats.org/markup-compatibility/2006">
+        <mc:Choice xmlns:a14="http://schemas.microsoft.com/office/drawing/2010/main" Requires="a14">
           <p:sp>
             <p:nvSpPr>
               <p:cNvPr id="3" name="Content Placeholder 2">
@@ -15364,7 +15412,19 @@
                         <a:rPr lang="en-IN" sz="1900" b="0" i="1" smtClean="0">
                           <a:latin typeface="Cambria Math" panose="02040503050406030204" pitchFamily="18" charset="0"/>
                         </a:rPr>
-                        <m:t>=10→¬</m:t>
+                        <m:t>=10</m:t>
+                      </m:r>
+                      <m:r>
+                        <a:rPr lang="en-IN" sz="1900" b="0" i="1" smtClean="0">
+                          <a:latin typeface="Cambria Math" panose="02040503050406030204" pitchFamily="18" charset="0"/>
+                        </a:rPr>
+                        <m:t>∧</m:t>
+                      </m:r>
+                      <m:r>
+                        <a:rPr lang="en-IN" sz="1900" b="0" i="1" smtClean="0">
+                          <a:latin typeface="Cambria Math" panose="02040503050406030204" pitchFamily="18" charset="0"/>
+                        </a:rPr>
+                        <m:t>¬</m:t>
                       </m:r>
                       <m:d>
                         <m:dPr>
@@ -15514,7 +15574,25 @@
                         </a:solidFill>
                         <a:latin typeface="Cambria Math" panose="02040503050406030204" pitchFamily="18" charset="0"/>
                       </a:rPr>
-                      <m:t>=10→¬</m:t>
+                      <m:t>=10</m:t>
+                    </m:r>
+                    <m:r>
+                      <a:rPr lang="en-IN" sz="1900" b="0" i="1" smtClean="0">
+                        <a:solidFill>
+                          <a:schemeClr val="accent1"/>
+                        </a:solidFill>
+                        <a:latin typeface="Cambria Math" panose="02040503050406030204" pitchFamily="18" charset="0"/>
+                      </a:rPr>
+                      <m:t>∧</m:t>
+                    </m:r>
+                    <m:r>
+                      <a:rPr lang="en-IN" sz="1900" b="0" i="1" smtClean="0">
+                        <a:solidFill>
+                          <a:schemeClr val="accent1"/>
+                        </a:solidFill>
+                        <a:latin typeface="Cambria Math" panose="02040503050406030204" pitchFamily="18" charset="0"/>
+                      </a:rPr>
+                      <m:t>¬</m:t>
                     </m:r>
                     <m:d>
                       <m:dPr>
@@ -15710,7 +15788,25 @@
                             </a:solidFill>
                             <a:latin typeface="Cambria Math" panose="02040503050406030204" pitchFamily="18" charset="0"/>
                           </a:rPr>
-                          <m:t>=10→¬</m:t>
+                          <m:t>=10</m:t>
+                        </m:r>
+                        <m:r>
+                          <a:rPr lang="en-IN" sz="1900" b="0" i="1" smtClean="0">
+                            <a:solidFill>
+                              <a:schemeClr val="accent1"/>
+                            </a:solidFill>
+                            <a:latin typeface="Cambria Math" panose="02040503050406030204" pitchFamily="18" charset="0"/>
+                          </a:rPr>
+                          <m:t>∧</m:t>
+                        </m:r>
+                        <m:r>
+                          <a:rPr lang="en-IN" sz="1900" b="0" i="1" smtClean="0">
+                            <a:solidFill>
+                              <a:schemeClr val="accent1"/>
+                            </a:solidFill>
+                            <a:latin typeface="Cambria Math" panose="02040503050406030204" pitchFamily="18" charset="0"/>
+                          </a:rPr>
+                          <m:t>¬</m:t>
                         </m:r>
                         <m:d>
                           <m:dPr>
@@ -16158,6 +16254,29 @@
                             </m:r>
                           </m:sub>
                         </m:sSub>
+                        <m:d>
+                          <m:dPr>
+                            <m:ctrlPr>
+                              <a:rPr lang="en-IN" sz="1900" b="0" i="1" smtClean="0">
+                                <a:solidFill>
+                                  <a:schemeClr val="accent1"/>
+                                </a:solidFill>
+                                <a:latin typeface="Cambria Math" panose="02040503050406030204" pitchFamily="18" charset="0"/>
+                              </a:rPr>
+                            </m:ctrlPr>
+                          </m:dPr>
+                          <m:e>
+                            <m:r>
+                              <a:rPr lang="en-IN" sz="1900" b="0" i="1" smtClean="0">
+                                <a:solidFill>
+                                  <a:schemeClr val="accent1"/>
+                                </a:solidFill>
+                                <a:latin typeface="Cambria Math" panose="02040503050406030204" pitchFamily="18" charset="0"/>
+                              </a:rPr>
+                              <m:t>0</m:t>
+                            </m:r>
+                          </m:e>
+                        </m:d>
                         <m:r>
                           <a:rPr lang="en-IN" sz="1900" b="0" i="1" smtClean="0">
                             <a:solidFill>
@@ -16165,7 +16284,25 @@
                             </a:solidFill>
                             <a:latin typeface="Cambria Math" panose="02040503050406030204" pitchFamily="18" charset="0"/>
                           </a:rPr>
-                          <m:t>(0)=10→¬</m:t>
+                          <m:t>=10</m:t>
+                        </m:r>
+                        <m:r>
+                          <a:rPr lang="en-IN" sz="1900" b="0" i="1" smtClean="0">
+                            <a:solidFill>
+                              <a:schemeClr val="accent1"/>
+                            </a:solidFill>
+                            <a:latin typeface="Cambria Math" panose="02040503050406030204" pitchFamily="18" charset="0"/>
+                          </a:rPr>
+                          <m:t>∧</m:t>
+                        </m:r>
+                        <m:r>
+                          <a:rPr lang="en-IN" sz="1900" b="0" i="1" smtClean="0">
+                            <a:solidFill>
+                              <a:schemeClr val="accent1"/>
+                            </a:solidFill>
+                            <a:latin typeface="Cambria Math" panose="02040503050406030204" pitchFamily="18" charset="0"/>
+                          </a:rPr>
+                          <m:t>¬</m:t>
                         </m:r>
                         <m:d>
                           <m:dPr>
@@ -16629,7 +16766,7 @@
             </p:txBody>
           </p:sp>
         </mc:Choice>
-        <mc:Fallback xmlns="">
+        <mc:Fallback>
           <p:sp>
             <p:nvSpPr>
               <p:cNvPr id="3" name="Content Placeholder 2">
@@ -25527,8 +25664,8 @@
           </a:p>
         </p:txBody>
       </p:sp>
-      <mc:AlternateContent xmlns:mc="http://schemas.openxmlformats.org/markup-compatibility/2006">
-        <mc:Choice xmlns:a14="http://schemas.microsoft.com/office/drawing/2010/main" Requires="a14">
+      <mc:AlternateContent xmlns:mc="http://schemas.openxmlformats.org/markup-compatibility/2006" xmlns:a14="http://schemas.microsoft.com/office/drawing/2010/main">
+        <mc:Choice Requires="a14">
           <p:sp>
             <p:nvSpPr>
               <p:cNvPr id="3" name="Content Placeholder 2">
@@ -25577,13 +25714,7 @@
                           <a:rPr lang="en-IN" b="0" i="1" smtClean="0">
                             <a:latin typeface="Cambria Math" panose="02040503050406030204" pitchFamily="18" charset="0"/>
                           </a:rPr>
-                          <m:t>𝐸</m:t>
-                        </m:r>
-                        <m:r>
-                          <a:rPr lang="en-IN" b="0" i="1" smtClean="0">
-                            <a:latin typeface="Cambria Math" panose="02040503050406030204" pitchFamily="18" charset="0"/>
-                          </a:rPr>
-                          <m:t>𝑈𝐹</m:t>
+                          <m:t>𝐸𝑈𝐹</m:t>
                         </m:r>
                       </m:sub>
                     </m:sSub>
@@ -26197,13 +26328,7 @@
                           <a:rPr lang="en-IN" b="0" i="1" dirty="0" smtClean="0">
                             <a:latin typeface="Cambria Math" panose="02040503050406030204" pitchFamily="18" charset="0"/>
                           </a:rPr>
-                          <m:t>𝐸</m:t>
-                        </m:r>
-                        <m:r>
-                          <a:rPr lang="en-IN" b="0" i="1" dirty="0" smtClean="0">
-                            <a:latin typeface="Cambria Math" panose="02040503050406030204" pitchFamily="18" charset="0"/>
-                          </a:rPr>
-                          <m:t>𝑈𝐹</m:t>
+                          <m:t>𝐸𝑈𝐹</m:t>
                         </m:r>
                       </m:sub>
                     </m:sSub>
@@ -26467,13 +26592,7 @@
                           <a:rPr lang="en-IN" b="0" i="1" smtClean="0">
                             <a:latin typeface="Cambria Math" panose="02040503050406030204" pitchFamily="18" charset="0"/>
                           </a:rPr>
-                          <m:t>𝐸</m:t>
-                        </m:r>
-                        <m:r>
-                          <a:rPr lang="en-IN" b="0" i="1" smtClean="0">
-                            <a:latin typeface="Cambria Math" panose="02040503050406030204" pitchFamily="18" charset="0"/>
-                          </a:rPr>
-                          <m:t>𝑈𝐹</m:t>
+                          <m:t>𝐸𝑈𝐹</m:t>
                         </m:r>
                       </m:sub>
                     </m:sSub>
@@ -26756,7 +26875,7 @@
             </p:txBody>
           </p:sp>
         </mc:Choice>
-        <mc:Fallback>
+        <mc:Fallback xmlns="">
           <p:sp>
             <p:nvSpPr>
               <p:cNvPr id="3" name="Content Placeholder 2">
@@ -27075,8 +27194,8 @@
           </a:p>
         </p:txBody>
       </p:sp>
-      <mc:AlternateContent xmlns:mc="http://schemas.openxmlformats.org/markup-compatibility/2006">
-        <mc:Choice xmlns:a14="http://schemas.microsoft.com/office/drawing/2010/main" Requires="a14">
+      <mc:AlternateContent xmlns:mc="http://schemas.openxmlformats.org/markup-compatibility/2006" xmlns:a14="http://schemas.microsoft.com/office/drawing/2010/main">
+        <mc:Choice Requires="a14">
           <p:sp>
             <p:nvSpPr>
               <p:cNvPr id="3" name="Content Placeholder 2">
@@ -27125,13 +27244,7 @@
                           <a:rPr lang="en-IN" b="0" i="1" smtClean="0">
                             <a:latin typeface="Cambria Math" panose="02040503050406030204" pitchFamily="18" charset="0"/>
                           </a:rPr>
-                          <m:t>𝐸</m:t>
-                        </m:r>
-                        <m:r>
-                          <a:rPr lang="en-IN" b="0" i="1" smtClean="0">
-                            <a:latin typeface="Cambria Math" panose="02040503050406030204" pitchFamily="18" charset="0"/>
-                          </a:rPr>
-                          <m:t>𝑈𝐹</m:t>
+                          <m:t>𝐸𝑈𝐹</m:t>
                         </m:r>
                       </m:sub>
                     </m:sSub>
@@ -27745,13 +27858,7 @@
                           <a:rPr lang="en-IN" b="0" i="1" dirty="0" smtClean="0">
                             <a:latin typeface="Cambria Math" panose="02040503050406030204" pitchFamily="18" charset="0"/>
                           </a:rPr>
-                          <m:t>𝐸</m:t>
-                        </m:r>
-                        <m:r>
-                          <a:rPr lang="en-IN" b="0" i="1" dirty="0" smtClean="0">
-                            <a:latin typeface="Cambria Math" panose="02040503050406030204" pitchFamily="18" charset="0"/>
-                          </a:rPr>
-                          <m:t>𝑈𝐹</m:t>
+                          <m:t>𝐸𝑈𝐹</m:t>
                         </m:r>
                       </m:sub>
                     </m:sSub>
@@ -28023,13 +28130,7 @@
                           <a:rPr lang="en-IN" b="0" i="1" smtClean="0">
                             <a:latin typeface="Cambria Math" panose="02040503050406030204" pitchFamily="18" charset="0"/>
                           </a:rPr>
-                          <m:t>𝐸</m:t>
-                        </m:r>
-                        <m:r>
-                          <a:rPr lang="en-IN" b="0" i="1" smtClean="0">
-                            <a:latin typeface="Cambria Math" panose="02040503050406030204" pitchFamily="18" charset="0"/>
-                          </a:rPr>
-                          <m:t>𝑈𝐹</m:t>
+                          <m:t>𝐸𝑈𝐹</m:t>
                         </m:r>
                       </m:sub>
                     </m:sSub>
@@ -28320,7 +28421,7 @@
             </p:txBody>
           </p:sp>
         </mc:Choice>
-        <mc:Fallback>
+        <mc:Fallback xmlns="">
           <p:sp>
             <p:nvSpPr>
               <p:cNvPr id="3" name="Content Placeholder 2">
